--- a/curriculum/M01/W03/L03/slides-2.pptx
+++ b/curriculum/M01/W03/L03/slides-2.pptx
@@ -5950,17 +5950,46 @@
                 <a:ea typeface="Malgun Gothic"/>
                 <a:cs typeface="Malgun Gothic"/>
               </a:rPr>
-              <a:t>(세포 안 Ca²⁺의 양)으로 조절한다. 2. </a:t>
-            </a:r>
+              <a:t>(세포 안 Ca²⁺의 양)으로 조절한다.</a:t>
+            </a:r>
+          </a:p>
+          <a:p>
+            <a:pPr>
+              <a:spcAft>
+                <a:spcPts val="900"/>
+              </a:spcAft>
+            </a:pPr>
             <a:r>
               <a:rPr sz="1400" b="1" i="0">
                 <a:solidFill>
+                  <a:srgbClr val="F2B705"/>
+                </a:solidFill>
+                <a:latin typeface="Malgun Gothic"/>
+                <a:ea typeface="Malgun Gothic"/>
+                <a:cs typeface="Malgun Gothic"/>
+              </a:rPr>
+              <a:t>•  </a:t>
+            </a:r>
+            <a:r>
+              <a:rPr sz="1400" b="0" i="0">
+                <a:solidFill>
                   <a:srgbClr val="11202B"/>
                 </a:solidFill>
                 <a:latin typeface="Malgun Gothic"/>
                 <a:ea typeface="Malgun Gothic"/>
                 <a:cs typeface="Malgun Gothic"/>
               </a:rPr>
+              <a:t>2. </a:t>
+            </a:r>
+            <a:r>
+              <a:rPr sz="1400" b="1" i="0">
+                <a:solidFill>
+                  <a:srgbClr val="11202B"/>
+                </a:solidFill>
+                <a:latin typeface="Malgun Gothic"/>
+                <a:ea typeface="Malgun Gothic"/>
+                <a:cs typeface="Malgun Gothic"/>
+              </a:rPr>
               <a:t>Ca²⁺ 유도 Ca²⁺ 방출에 의존한다.</a:t>
             </a:r>
             <a:r>
@@ -5972,7 +6001,36 @@
                 <a:ea typeface="Malgun Gothic"/>
                 <a:cs typeface="Malgun Gothic"/>
               </a:rPr>
-              <a:t> 세포 밖에서 들어온 Ca²⁺의 양이 방출량을 정하므로, 들어오는 Ca²⁺을 조절하면 수축력이 바뀐다. 교감신경의 β₁–cAMP–PKA 경로가 L형 Ca²⁺ 통로를 인산화해 수축력을 올리는 것이 이 지점이다. 3. </a:t>
+              <a:t> 세포 밖에서 들어온 Ca²⁺의 양이 방출량을 정하므로, 들어오는 Ca²⁺을 조절하면 수축력이 바뀐다. 교감신경의 β₁–cAMP–PKA 경로가 L형 Ca²⁺ 통로를 인산화해 수축력을 올리는 것이 이 지점이다.</a:t>
+            </a:r>
+          </a:p>
+          <a:p>
+            <a:pPr>
+              <a:spcAft>
+                <a:spcPts val="900"/>
+              </a:spcAft>
+            </a:pPr>
+            <a:r>
+              <a:rPr sz="1400" b="1" i="0">
+                <a:solidFill>
+                  <a:srgbClr val="F2B705"/>
+                </a:solidFill>
+                <a:latin typeface="Malgun Gothic"/>
+                <a:ea typeface="Malgun Gothic"/>
+                <a:cs typeface="Malgun Gothic"/>
+              </a:rPr>
+              <a:t>•  </a:t>
+            </a:r>
+            <a:r>
+              <a:rPr sz="1400" b="0" i="0">
+                <a:solidFill>
+                  <a:srgbClr val="11202B"/>
+                </a:solidFill>
+                <a:latin typeface="Malgun Gothic"/>
+                <a:ea typeface="Malgun Gothic"/>
+                <a:cs typeface="Malgun Gothic"/>
+              </a:rPr>
+              <a:t>3. </a:t>
             </a:r>
             <a:r>
               <a:rPr sz="1400" b="1" i="0">
@@ -7078,17 +7136,46 @@
                 <a:ea typeface="Malgun Gothic"/>
                 <a:cs typeface="Malgun Gothic"/>
               </a:rPr>
-              <a:t>: 중배엽 세포가 근육 계통으로 정해진다. MyoD와 Myf5 같은 전사인자가 켜지면서 근육모세포(myoblast)가 된다. 2. </a:t>
-            </a:r>
+              <a:t>: 중배엽 세포가 근육 계통으로 정해진다. MyoD와 Myf5 같은 전사인자가 켜지면서 근육모세포(myoblast)가 된다.</a:t>
+            </a:r>
+          </a:p>
+          <a:p>
+            <a:pPr>
+              <a:spcAft>
+                <a:spcPts val="900"/>
+              </a:spcAft>
+            </a:pPr>
             <a:r>
               <a:rPr sz="1400" b="1" i="0">
                 <a:solidFill>
+                  <a:srgbClr val="F2B705"/>
+                </a:solidFill>
+                <a:latin typeface="Malgun Gothic"/>
+                <a:ea typeface="Malgun Gothic"/>
+                <a:cs typeface="Malgun Gothic"/>
+              </a:rPr>
+              <a:t>•  </a:t>
+            </a:r>
+            <a:r>
+              <a:rPr sz="1400" b="0" i="0">
+                <a:solidFill>
                   <a:srgbClr val="11202B"/>
                 </a:solidFill>
                 <a:latin typeface="Malgun Gothic"/>
                 <a:ea typeface="Malgun Gothic"/>
                 <a:cs typeface="Malgun Gothic"/>
               </a:rPr>
+              <a:t>2. </a:t>
+            </a:r>
+            <a:r>
+              <a:rPr sz="1400" b="1" i="0">
+                <a:solidFill>
+                  <a:srgbClr val="11202B"/>
+                </a:solidFill>
+                <a:latin typeface="Malgun Gothic"/>
+                <a:ea typeface="Malgun Gothic"/>
+                <a:cs typeface="Malgun Gothic"/>
+              </a:rPr>
               <a:t>증식</a:t>
             </a:r>
             <a:r>
@@ -7100,17 +7187,46 @@
                 <a:ea typeface="Malgun Gothic"/>
                 <a:cs typeface="Malgun Gothic"/>
               </a:rPr>
-              <a:t>: 근육모세포가 수를 늘린다. 이 단계에서는 아직 수축 단백질을 만들지 않는다. 3. </a:t>
-            </a:r>
+              <a:t>: 근육모세포가 수를 늘린다. 이 단계에서는 아직 수축 단백질을 만들지 않는다.</a:t>
+            </a:r>
+          </a:p>
+          <a:p>
+            <a:pPr>
+              <a:spcAft>
+                <a:spcPts val="900"/>
+              </a:spcAft>
+            </a:pPr>
             <a:r>
               <a:rPr sz="1400" b="1" i="0">
                 <a:solidFill>
+                  <a:srgbClr val="F2B705"/>
+                </a:solidFill>
+                <a:latin typeface="Malgun Gothic"/>
+                <a:ea typeface="Malgun Gothic"/>
+                <a:cs typeface="Malgun Gothic"/>
+              </a:rPr>
+              <a:t>•  </a:t>
+            </a:r>
+            <a:r>
+              <a:rPr sz="1400" b="0" i="0">
+                <a:solidFill>
                   <a:srgbClr val="11202B"/>
                 </a:solidFill>
                 <a:latin typeface="Malgun Gothic"/>
                 <a:ea typeface="Malgun Gothic"/>
                 <a:cs typeface="Malgun Gothic"/>
               </a:rPr>
+              <a:t>3. </a:t>
+            </a:r>
+            <a:r>
+              <a:rPr sz="1400" b="1" i="0">
+                <a:solidFill>
+                  <a:srgbClr val="11202B"/>
+                </a:solidFill>
+                <a:latin typeface="Malgun Gothic"/>
+                <a:ea typeface="Malgun Gothic"/>
+                <a:cs typeface="Malgun Gothic"/>
+              </a:rPr>
               <a:t>융합</a:t>
             </a:r>
             <a:r>
@@ -7122,7 +7238,36 @@
                 <a:ea typeface="Malgun Gothic"/>
                 <a:cs typeface="Malgun Gothic"/>
               </a:rPr>
-              <a:t>: 근육모세포들이 서로 융합해 다핵의 근관(myotube)을 만든다. 융합과 동시에 세포주기에서 영구히 빠져나온다. 4. </a:t>
+              <a:t>: 근육모세포들이 서로 융합해 다핵의 근관(myotube)을 만든다. 융합과 동시에 세포주기에서 영구히 빠져나온다.</a:t>
+            </a:r>
+          </a:p>
+          <a:p>
+            <a:pPr>
+              <a:spcAft>
+                <a:spcPts val="900"/>
+              </a:spcAft>
+            </a:pPr>
+            <a:r>
+              <a:rPr sz="1400" b="1" i="0">
+                <a:solidFill>
+                  <a:srgbClr val="F2B705"/>
+                </a:solidFill>
+                <a:latin typeface="Malgun Gothic"/>
+                <a:ea typeface="Malgun Gothic"/>
+                <a:cs typeface="Malgun Gothic"/>
+              </a:rPr>
+              <a:t>•  </a:t>
+            </a:r>
+            <a:r>
+              <a:rPr sz="1400" b="0" i="0">
+                <a:solidFill>
+                  <a:srgbClr val="11202B"/>
+                </a:solidFill>
+                <a:latin typeface="Malgun Gothic"/>
+                <a:ea typeface="Malgun Gothic"/>
+                <a:cs typeface="Malgun Gothic"/>
+              </a:rPr>
+              <a:t>4. </a:t>
             </a:r>
             <a:r>
               <a:rPr sz="1400" b="1" i="0">

--- a/curriculum/M01/W03/L03/slides-2.pptx
+++ b/curriculum/M01/W03/L03/slides-2.pptx
@@ -15075,7 +15075,7 @@
                 <a:ea typeface="Malgun Gothic"/>
                 <a:cs typeface="Malgun Gothic"/>
               </a:rPr>
-              <a:t>M01-W01-L01 순환계 요약 — 심근의 수축과 Frank–Starling 기전</a:t>
+              <a:t>M01-W01-L01 순환계 요약: 심장·혈관·혈류와 항상성 — 심근의 수축과 Frank–Starling 기전</a:t>
             </a:r>
           </a:p>
           <a:p>
@@ -15104,7 +15104,7 @@
                 <a:ea typeface="Malgun Gothic"/>
                 <a:cs typeface="Malgun Gothic"/>
               </a:rPr>
-              <a:t>M01-W03-L02 동물행동 요약 — 운동신경세포, 반사궁, 근방추</a:t>
+              <a:t>M01-W03-L02 동물행동 요약: 감각·행동·학습과 적응 — 운동신경세포, 반사궁, 근방추</a:t>
             </a:r>
           </a:p>
           <a:p>
@@ -15133,7 +15133,7 @@
                 <a:ea typeface="Malgun Gothic"/>
                 <a:cs typeface="Malgun Gothic"/>
               </a:rPr>
-              <a:t>M01-W09-L02 생체에너지 — ATP와 자유에너지의 기본</a:t>
+              <a:t>M01-W09-L02 생체에너지: 자유에너지와 ATP — ATP와 자유에너지의 기본</a:t>
             </a:r>
           </a:p>
         </p:txBody>

--- a/curriculum/M01/W03/L03/slides-2.pptx
+++ b/curriculum/M01/W03/L03/slides-2.pptx
@@ -5836,6 +5836,57 @@
               <a:t>•  </a:t>
             </a:r>
             <a:r>
+              <a:rPr sz="1400" b="0" i="0">
+                <a:solidFill>
+                  <a:srgbClr val="11202B"/>
+                </a:solidFill>
+                <a:latin typeface="Malgun Gothic"/>
+                <a:ea typeface="Malgun Gothic"/>
+                <a:cs typeface="Malgun Gothic"/>
+              </a:rPr>
+              <a:t>여기까지는 골격근 하나만 보았다. 그런데 몸에는 뜻대로 움직일 수 없는 근육이 두 종류 더 있다. 중요한 점은 </a:t>
+            </a:r>
+            <a:r>
+              <a:rPr sz="1400" b="1" i="0">
+                <a:solidFill>
+                  <a:srgbClr val="11202B"/>
+                </a:solidFill>
+                <a:latin typeface="Malgun Gothic"/>
+                <a:ea typeface="Malgun Gothic"/>
+                <a:cs typeface="Malgun Gothic"/>
+              </a:rPr>
+              <a:t>당기는 기계 자체는 거의 같고 조절하는 방식이 다르다</a:t>
+            </a:r>
+            <a:r>
+              <a:rPr sz="1400" b="0" i="0">
+                <a:solidFill>
+                  <a:srgbClr val="11202B"/>
+                </a:solidFill>
+                <a:latin typeface="Malgun Gothic"/>
+                <a:ea typeface="Malgun Gothic"/>
+                <a:cs typeface="Malgun Gothic"/>
+              </a:rPr>
+              <a:t>는 것이다. 그래서 차이만 짚으면 되고, 그 차이가 그대로 약물의 선택성을 만든다.</a:t>
+            </a:r>
+          </a:p>
+          <a:p>
+            <a:pPr>
+              <a:spcAft>
+                <a:spcPts val="900"/>
+              </a:spcAft>
+            </a:pPr>
+            <a:r>
+              <a:rPr sz="1400" b="1" i="0">
+                <a:solidFill>
+                  <a:srgbClr val="F2B705"/>
+                </a:solidFill>
+                <a:latin typeface="Malgun Gothic"/>
+                <a:ea typeface="Malgun Gothic"/>
+                <a:cs typeface="Malgun Gothic"/>
+              </a:rPr>
+              <a:t>•  </a:t>
+            </a:r>
+            <a:r>
               <a:rPr sz="1400" b="1" i="0">
                 <a:solidFill>
                   <a:srgbClr val="11202B"/>
@@ -7045,6 +7096,57 @@
                 <a:ea typeface="Malgun Gothic"/>
                 <a:cs typeface="Malgun Gothic"/>
               </a:rPr>
+              <a:t>지금까지는 다 자란 근육이 어떻게 작동하는지를 보았다. 그런데 근육세포는 만들어지는 방식부터 특이하다. 여러 세포가 하나로 합쳐져 만들어지고, 그 뒤로는 분열하지 않으면서 평생 유지된다. </a:t>
+            </a:r>
+            <a:r>
+              <a:rPr sz="1400" b="1" i="0">
+                <a:solidFill>
+                  <a:srgbClr val="11202B"/>
+                </a:solidFill>
+                <a:latin typeface="Malgun Gothic"/>
+                <a:ea typeface="Malgun Gothic"/>
+                <a:cs typeface="Malgun Gothic"/>
+              </a:rPr>
+              <a:t>분열하지 않는 세포가 어떻게 커지고 수리되는가</a:t>
+            </a:r>
+            <a:r>
+              <a:rPr sz="1400" b="0" i="0">
+                <a:solidFill>
+                  <a:srgbClr val="11202B"/>
+                </a:solidFill>
+                <a:latin typeface="Malgun Gothic"/>
+                <a:ea typeface="Malgun Gothic"/>
+                <a:cs typeface="Malgun Gothic"/>
+              </a:rPr>
+              <a:t>가 이 절의 질문이다.</a:t>
+            </a:r>
+          </a:p>
+          <a:p>
+            <a:pPr>
+              <a:spcAft>
+                <a:spcPts val="900"/>
+              </a:spcAft>
+            </a:pPr>
+            <a:r>
+              <a:rPr sz="1400" b="1" i="0">
+                <a:solidFill>
+                  <a:srgbClr val="F2B705"/>
+                </a:solidFill>
+                <a:latin typeface="Malgun Gothic"/>
+                <a:ea typeface="Malgun Gothic"/>
+                <a:cs typeface="Malgun Gothic"/>
+              </a:rPr>
+              <a:t>•  </a:t>
+            </a:r>
+            <a:r>
+              <a:rPr sz="1400" b="0" i="0">
+                <a:solidFill>
+                  <a:srgbClr val="11202B"/>
+                </a:solidFill>
+                <a:latin typeface="Malgun Gothic"/>
+                <a:ea typeface="Malgun Gothic"/>
+                <a:cs typeface="Malgun Gothic"/>
+              </a:rPr>
               <a:t>근육세포는 몸에서 가장 특이한 세포에 속한다. 여러 세포가 융합해 만들어지고, 분열하지 않으면서 평생 유지되며, 쓰임에 따라 크기를 바꾼다. 이 특성이 어떻게 생기는지를 보면 재생과 질환이 함께 설명된다.</a:t>
             </a:r>
           </a:p>
@@ -8040,7 +8142,7 @@
               </a:spcAft>
             </a:pPr>
             <a:r>
-              <a:rPr sz="1600" b="1" i="0">
+              <a:rPr sz="1400" b="1" i="0">
                 <a:solidFill>
                   <a:srgbClr val="F2B705"/>
                 </a:solidFill>
@@ -8051,7 +8153,7 @@
               <a:t>•  </a:t>
             </a:r>
             <a:r>
-              <a:rPr sz="1600" b="1" i="0">
+              <a:rPr sz="1400" b="0" i="0">
                 <a:solidFill>
                   <a:srgbClr val="11202B"/>
                 </a:solidFill>
@@ -8059,10 +8161,10 @@
                 <a:ea typeface="Malgun Gothic"/>
                 <a:cs typeface="Malgun Gothic"/>
               </a:rPr>
-              <a:t>훈련에 대한 적응.</a:t>
-            </a:r>
-            <a:r>
-              <a:rPr sz="1600" b="0" i="0">
+              <a:t>앞 절에서 근육이 분열하지 않고도 크기를 바꾼다는 것을 보았다. 그러면 </a:t>
+            </a:r>
+            <a:r>
+              <a:rPr sz="1400" b="1" i="0">
                 <a:solidFill>
                   <a:srgbClr val="11202B"/>
                 </a:solidFill>
@@ -8070,7 +8172,18 @@
                 <a:ea typeface="Malgun Gothic"/>
                 <a:cs typeface="Malgun Gothic"/>
               </a:rPr>
-              <a:t> 자극의 종류가 적응의 방향을 정한다.</a:t>
+              <a:t>무엇이 그 변화의 방향을 정하는가.</a:t>
+            </a:r>
+            <a:r>
+              <a:rPr sz="1400" b="0" i="0">
+                <a:solidFill>
+                  <a:srgbClr val="11202B"/>
+                </a:solidFill>
+                <a:latin typeface="Malgun Gothic"/>
+                <a:ea typeface="Malgun Gothic"/>
+                <a:cs typeface="Malgun Gothic"/>
+              </a:rPr>
+              <a:t> 같은 운동이라도 무겁게 적게 드는 것과 가볍게 오래 하는 것이 서로 다른 결과를 낳는다. 이 절은 자극의 종류와 적응의 방향을 짝지어 본다.</a:t>
             </a:r>
           </a:p>
           <a:p>
@@ -8080,7 +8193,7 @@
               </a:spcAft>
             </a:pPr>
             <a:r>
-              <a:rPr sz="1600" b="1" i="0">
+              <a:rPr sz="1400" b="1" i="0">
                 <a:solidFill>
                   <a:srgbClr val="F2B705"/>
                 </a:solidFill>
@@ -8091,7 +8204,7 @@
               <a:t>•  </a:t>
             </a:r>
             <a:r>
-              <a:rPr sz="1600" b="1" i="0">
+              <a:rPr sz="1400" b="1" i="0">
                 <a:solidFill>
                   <a:srgbClr val="11202B"/>
                 </a:solidFill>
@@ -8099,10 +8212,10 @@
                 <a:ea typeface="Malgun Gothic"/>
                 <a:cs typeface="Malgun Gothic"/>
               </a:rPr>
-              <a:t>저항 훈련</a:t>
-            </a:r>
-            <a:r>
-              <a:rPr sz="1600" b="0" i="0">
+              <a:t>훈련에 대한 적응.</a:t>
+            </a:r>
+            <a:r>
+              <a:rPr sz="1400" b="0" i="0">
                 <a:solidFill>
                   <a:srgbClr val="11202B"/>
                 </a:solidFill>
@@ -8110,29 +8223,7 @@
                 <a:ea typeface="Malgun Gothic"/>
                 <a:cs typeface="Malgun Gothic"/>
               </a:rPr>
-              <a:t>(무거운 부하, 적은 반복): 근섬유의 </a:t>
-            </a:r>
-            <a:r>
-              <a:rPr sz="1600" b="1" i="0">
-                <a:solidFill>
-                  <a:srgbClr val="11202B"/>
-                </a:solidFill>
-                <a:latin typeface="Malgun Gothic"/>
-                <a:ea typeface="Malgun Gothic"/>
-                <a:cs typeface="Malgun Gothic"/>
-              </a:rPr>
-              <a:t>단면적이 커진다</a:t>
-            </a:r>
-            <a:r>
-              <a:rPr sz="1600" b="0" i="0">
-                <a:solidFill>
-                  <a:srgbClr val="11202B"/>
-                </a:solidFill>
-                <a:latin typeface="Malgun Gothic"/>
-                <a:ea typeface="Malgun Gothic"/>
-                <a:cs typeface="Malgun Gothic"/>
-              </a:rPr>
-              <a:t>(비대). 수축 단백질이 늘어나는 것이며, 성인에서 근섬유의 수 자체는 거의 늘지 않는다. 초기 몇 주의 근력 증가는 신경계의 적응(동원 효율 향상)이 더 크다.</a:t>
+              <a:t> 자극의 종류가 적응의 방향을 정한다.</a:t>
             </a:r>
           </a:p>
           <a:p>
@@ -8142,7 +8233,7 @@
               </a:spcAft>
             </a:pPr>
             <a:r>
-              <a:rPr sz="1600" b="1" i="0">
+              <a:rPr sz="1400" b="1" i="0">
                 <a:solidFill>
                   <a:srgbClr val="F2B705"/>
                 </a:solidFill>
@@ -8153,7 +8244,7 @@
               <a:t>•  </a:t>
             </a:r>
             <a:r>
-              <a:rPr sz="1600" b="1" i="0">
+              <a:rPr sz="1400" b="1" i="0">
                 <a:solidFill>
                   <a:srgbClr val="11202B"/>
                 </a:solidFill>
@@ -8161,10 +8252,10 @@
                 <a:ea typeface="Malgun Gothic"/>
                 <a:cs typeface="Malgun Gothic"/>
               </a:rPr>
-              <a:t>지구력 훈련</a:t>
-            </a:r>
-            <a:r>
-              <a:rPr sz="1600" b="0" i="0">
+              <a:t>저항 훈련</a:t>
+            </a:r>
+            <a:r>
+              <a:rPr sz="1400" b="0" i="0">
                 <a:solidFill>
                   <a:srgbClr val="11202B"/>
                 </a:solidFill>
@@ -8172,7 +8263,29 @@
                 <a:ea typeface="Malgun Gothic"/>
                 <a:cs typeface="Malgun Gothic"/>
               </a:rPr>
-              <a:t>(가벼운 부하, 많은 반복): 미토콘드리아와 모세혈관이 늘고 산화 효소가 증가한다. 단면적은 크게 변하지 않는다. IIx형이 IIa형 쪽으로 이동하는 변화도 관찰된다.</a:t>
+              <a:t>(무거운 부하, 적은 반복): 근섬유의 </a:t>
+            </a:r>
+            <a:r>
+              <a:rPr sz="1400" b="1" i="0">
+                <a:solidFill>
+                  <a:srgbClr val="11202B"/>
+                </a:solidFill>
+                <a:latin typeface="Malgun Gothic"/>
+                <a:ea typeface="Malgun Gothic"/>
+                <a:cs typeface="Malgun Gothic"/>
+              </a:rPr>
+              <a:t>단면적이 커진다</a:t>
+            </a:r>
+            <a:r>
+              <a:rPr sz="1400" b="0" i="0">
+                <a:solidFill>
+                  <a:srgbClr val="11202B"/>
+                </a:solidFill>
+                <a:latin typeface="Malgun Gothic"/>
+                <a:ea typeface="Malgun Gothic"/>
+                <a:cs typeface="Malgun Gothic"/>
+              </a:rPr>
+              <a:t>(비대). 수축 단백질이 늘어나는 것이며, 성인에서 근섬유의 수 자체는 거의 늘지 않는다. 초기 몇 주의 근력 증가는 신경계의 적응(동원 효율 향상)이 더 크다.</a:t>
             </a:r>
           </a:p>
           <a:p>
@@ -8182,7 +8295,7 @@
               </a:spcAft>
             </a:pPr>
             <a:r>
-              <a:rPr sz="1600" b="1" i="0">
+              <a:rPr sz="1400" b="1" i="0">
                 <a:solidFill>
                   <a:srgbClr val="F2B705"/>
                 </a:solidFill>
@@ -8193,7 +8306,7 @@
               <a:t>•  </a:t>
             </a:r>
             <a:r>
-              <a:rPr sz="1600" b="0" i="0">
+              <a:rPr sz="1400" b="1" i="0">
                 <a:solidFill>
                   <a:srgbClr val="11202B"/>
                 </a:solidFill>
@@ -8201,7 +8314,18 @@
                 <a:ea typeface="Malgun Gothic"/>
                 <a:cs typeface="Malgun Gothic"/>
               </a:rPr>
-              <a:t>적응의 방향을 정하는 신호도 다르다. 저항 훈련에서는 기계적 부하가 mTOR 경로를 통해 단백질 합성을 올리고, 지구력 훈련에서는 에너지 소모에 따른 AMP 상승이 AMPK를 거쳐 미토콘드리아 생성을 촉진한다. 두 신호가 서로를 억제하는 면이 있어, 같은 시기에 두 훈련을 극단적으로 병행하면 각각의 효과가 줄어드는 간섭이 관찰된다. 경로의 상세는 M02-W12-L03에서 다룬다.</a:t>
+              <a:t>지구력 훈련</a:t>
+            </a:r>
+            <a:r>
+              <a:rPr sz="1400" b="0" i="0">
+                <a:solidFill>
+                  <a:srgbClr val="11202B"/>
+                </a:solidFill>
+                <a:latin typeface="Malgun Gothic"/>
+                <a:ea typeface="Malgun Gothic"/>
+                <a:cs typeface="Malgun Gothic"/>
+              </a:rPr>
+              <a:t>(가벼운 부하, 많은 반복): 미토콘드리아와 모세혈관이 늘고 산화 효소가 증가한다. 단면적은 크게 변하지 않는다. IIx형이 IIa형 쪽으로 이동하는 변화도 관찰된다.</a:t>
             </a:r>
           </a:p>
           <a:p>
@@ -8211,7 +8335,7 @@
               </a:spcAft>
             </a:pPr>
             <a:r>
-              <a:rPr sz="1600" b="1" i="0">
+              <a:rPr sz="1400" b="1" i="0">
                 <a:solidFill>
                   <a:srgbClr val="F2B705"/>
                 </a:solidFill>
@@ -8222,7 +8346,7 @@
               <a:t>•  </a:t>
             </a:r>
             <a:r>
-              <a:rPr sz="1600" b="1" i="0">
+              <a:rPr sz="1400" b="0" i="0">
                 <a:solidFill>
                   <a:srgbClr val="11202B"/>
                 </a:solidFill>
@@ -8230,10 +8354,39 @@
                 <a:ea typeface="Malgun Gothic"/>
                 <a:cs typeface="Malgun Gothic"/>
               </a:rPr>
+              <a:t>적응의 방향을 정하는 신호도 다르다. 저항 훈련에서는 기계적 부하가 mTOR 경로를 통해 단백질 합성을 올리고, 지구력 훈련에서는 에너지 소모에 따른 AMP 상승이 AMPK를 거쳐 미토콘드리아 생성을 촉진한다. 두 신호가 서로를 억제하는 면이 있어, 같은 시기에 두 훈련을 극단적으로 병행하면 각각의 효과가 줄어드는 간섭이 관찰된다. 경로의 상세는 M02-W12-L03에서 다룬다.</a:t>
+            </a:r>
+          </a:p>
+          <a:p>
+            <a:pPr>
+              <a:spcAft>
+                <a:spcPts val="900"/>
+              </a:spcAft>
+            </a:pPr>
+            <a:r>
+              <a:rPr sz="1400" b="1" i="0">
+                <a:solidFill>
+                  <a:srgbClr val="F2B705"/>
+                </a:solidFill>
+                <a:latin typeface="Malgun Gothic"/>
+                <a:ea typeface="Malgun Gothic"/>
+                <a:cs typeface="Malgun Gothic"/>
+              </a:rPr>
+              <a:t>•  </a:t>
+            </a:r>
+            <a:r>
+              <a:rPr sz="1400" b="1" i="0">
+                <a:solidFill>
+                  <a:srgbClr val="11202B"/>
+                </a:solidFill>
+                <a:latin typeface="Malgun Gothic"/>
+                <a:ea typeface="Malgun Gothic"/>
+                <a:cs typeface="Malgun Gothic"/>
+              </a:rPr>
               <a:t>비활동에 대한 적응.</a:t>
             </a:r>
             <a:r>
-              <a:rPr sz="1600" b="0" i="0">
+              <a:rPr sz="1400" b="0" i="0">
                 <a:solidFill>
                   <a:srgbClr val="11202B"/>
                 </a:solidFill>
@@ -8244,7 +8397,7 @@
               <a:t> 쓰지 않으면 빠르게 위축된다. 침상 안정이나 고정에서 수일 안에 단백질 합성이 줄고 분해가 늘어난다. </a:t>
             </a:r>
             <a:r>
-              <a:rPr sz="1600" b="1" i="0">
+              <a:rPr sz="1400" b="1" i="0">
                 <a:solidFill>
                   <a:srgbClr val="11202B"/>
                 </a:solidFill>
@@ -8255,7 +8408,7 @@
               <a:t>중력에 맞서 자세를 유지하는 근육</a:t>
             </a:r>
             <a:r>
-              <a:rPr sz="1600" b="0" i="0">
+              <a:rPr sz="1400" b="0" i="0">
                 <a:solidFill>
                   <a:srgbClr val="11202B"/>
                 </a:solidFill>
@@ -9577,7 +9730,7 @@
               </a:spcAft>
             </a:pPr>
             <a:r>
-              <a:rPr sz="2000" b="1" i="0">
+              <a:rPr sz="1800" b="1" i="0">
                 <a:solidFill>
                   <a:srgbClr val="F2B705"/>
                 </a:solidFill>
@@ -9588,7 +9741,7 @@
               <a:t>•  </a:t>
             </a:r>
             <a:r>
-              <a:rPr sz="2000" b="0" i="0">
+              <a:rPr sz="1800" b="0" i="0">
                 <a:solidFill>
                   <a:srgbClr val="11202B"/>
                 </a:solidFill>
@@ -9596,7 +9749,29 @@
                 <a:ea typeface="Malgun Gothic"/>
                 <a:cs typeface="Malgun Gothic"/>
               </a:rPr>
-              <a:t>근력 약화를 호소하는 환자 앞에서 던지는 첫 질문은 "어디가 문제인가"다. 운동의 사슬은 네 단계이며, 각 단계의 손상이 서로 다른 양상을 만든다.</a:t>
+              <a:t>여기까지 신경에서 근섬유까지의 사슬을 모두 세웠다. 임상에서 근력 약화를 호소하는 환자 앞에서 던지는 첫 질문은 "</a:t>
+            </a:r>
+            <a:r>
+              <a:rPr sz="1800" b="1" i="0">
+                <a:solidFill>
+                  <a:srgbClr val="11202B"/>
+                </a:solidFill>
+                <a:latin typeface="Malgun Gothic"/>
+                <a:ea typeface="Malgun Gothic"/>
+                <a:cs typeface="Malgun Gothic"/>
+              </a:rPr>
+              <a:t>그 사슬의 어느 칸이 끊어졌는가</a:t>
+            </a:r>
+            <a:r>
+              <a:rPr sz="1800" b="0" i="0">
+                <a:solidFill>
+                  <a:srgbClr val="11202B"/>
+                </a:solidFill>
+                <a:latin typeface="Malgun Gothic"/>
+                <a:ea typeface="Malgun Gothic"/>
+                <a:cs typeface="Malgun Gothic"/>
+              </a:rPr>
+              <a:t>"다. 칸마다 증상의 양상이 다르므로, 그 차이를 알면 검사를 하기 전에 범위를 좁힐 수 있다.</a:t>
             </a:r>
           </a:p>
           <a:p>
@@ -9606,7 +9781,7 @@
               </a:spcAft>
             </a:pPr>
             <a:r>
-              <a:rPr sz="2000" b="1" i="0">
+              <a:rPr sz="1800" b="1" i="0">
                 <a:solidFill>
                   <a:srgbClr val="F2B705"/>
                 </a:solidFill>
@@ -9617,7 +9792,36 @@
               <a:t>•  </a:t>
             </a:r>
             <a:r>
-              <a:rPr sz="2000" b="1" i="0">
+              <a:rPr sz="1800" b="0" i="0">
+                <a:solidFill>
+                  <a:srgbClr val="11202B"/>
+                </a:solidFill>
+                <a:latin typeface="Malgun Gothic"/>
+                <a:ea typeface="Malgun Gothic"/>
+                <a:cs typeface="Malgun Gothic"/>
+              </a:rPr>
+              <a:t>근력 약화를 호소하는 환자 앞에서 던지는 첫 질문은 "어디가 문제인가"다. 운동의 사슬은 네 단계이며, 각 단계의 손상이 서로 다른 양상을 만든다.</a:t>
+            </a:r>
+          </a:p>
+          <a:p>
+            <a:pPr>
+              <a:spcAft>
+                <a:spcPts val="900"/>
+              </a:spcAft>
+            </a:pPr>
+            <a:r>
+              <a:rPr sz="1800" b="1" i="0">
+                <a:solidFill>
+                  <a:srgbClr val="F2B705"/>
+                </a:solidFill>
+                <a:latin typeface="Malgun Gothic"/>
+                <a:ea typeface="Malgun Gothic"/>
+                <a:cs typeface="Malgun Gothic"/>
+              </a:rPr>
+              <a:t>•  </a:t>
+            </a:r>
+            <a:r>
+              <a:rPr sz="1800" b="1" i="0">
                 <a:solidFill>
                   <a:srgbClr val="11202B"/>
                 </a:solidFill>
@@ -12387,6 +12591,35 @@
                 <a:ea typeface="Malgun Gothic"/>
                 <a:cs typeface="Malgun Gothic"/>
               </a:rPr>
+              <a:t>근육은 세포생물학과 대사, 그리고 임상을 잇는 자리에 있다. 여기서 본 분자 기계, 칼슘 신호, 에너지 공급은 모두 뒤의 수업에서 다시 나온다. 마지막으로 각 주제가 어디에서 확대되는지를 정리한다.</a:t>
+            </a:r>
+          </a:p>
+          <a:p>
+            <a:pPr>
+              <a:spcAft>
+                <a:spcPts val="900"/>
+              </a:spcAft>
+            </a:pPr>
+            <a:r>
+              <a:rPr sz="1600" b="1" i="0">
+                <a:solidFill>
+                  <a:srgbClr val="F2B705"/>
+                </a:solidFill>
+                <a:latin typeface="Malgun Gothic"/>
+                <a:ea typeface="Malgun Gothic"/>
+                <a:cs typeface="Malgun Gothic"/>
+              </a:rPr>
+              <a:t>•  </a:t>
+            </a:r>
+            <a:r>
+              <a:rPr sz="1600" b="0" i="0">
+                <a:solidFill>
+                  <a:srgbClr val="11202B"/>
+                </a:solidFill>
+                <a:latin typeface="Malgun Gothic"/>
+                <a:ea typeface="Malgun Gothic"/>
+                <a:cs typeface="Malgun Gothic"/>
+              </a:rPr>
               <a:t>근육은 세포생물학과 대사, 그리고 임상을 잇는 자리에 있다. 각 주제가 어디에서 확대되는지를 정리한다.</a:t>
             </a:r>
           </a:p>
@@ -21918,7 +22151,7 @@
               </a:spcAft>
             </a:pPr>
             <a:r>
-              <a:rPr sz="2000" b="1" i="0">
+              <a:rPr sz="1800" b="1" i="0">
                 <a:solidFill>
                   <a:srgbClr val="F2B705"/>
                 </a:solidFill>
@@ -21929,7 +22162,7 @@
               <a:t>•  </a:t>
             </a:r>
             <a:r>
-              <a:rPr sz="2000" b="1" i="0">
+              <a:rPr sz="1800" b="0" i="0">
                 <a:solidFill>
                   <a:srgbClr val="11202B"/>
                 </a:solidFill>
@@ -21937,10 +22170,61 @@
                 <a:ea typeface="Malgun Gothic"/>
                 <a:cs typeface="Malgun Gothic"/>
               </a:rPr>
+              <a:t>앞의 절들은 수축의 기전과 역학이었다. 그런데 그 모든 과정이 ATP를 쓴다. 근육은 ATP를 거의 저장하지 않으므로 </a:t>
+            </a:r>
+            <a:r>
+              <a:rPr sz="1800" b="1" i="0">
+                <a:solidFill>
+                  <a:srgbClr val="11202B"/>
+                </a:solidFill>
+                <a:latin typeface="Malgun Gothic"/>
+                <a:ea typeface="Malgun Gothic"/>
+                <a:cs typeface="Malgun Gothic"/>
+              </a:rPr>
+              <a:t>쓰는 속도로 다시 만들어야 한다.</a:t>
+            </a:r>
+            <a:r>
+              <a:rPr sz="1800" b="0" i="0">
+                <a:solidFill>
+                  <a:srgbClr val="11202B"/>
+                </a:solidFill>
+                <a:latin typeface="Malgun Gothic"/>
+                <a:ea typeface="Malgun Gothic"/>
+                <a:cs typeface="Malgun Gothic"/>
+              </a:rPr>
+              <a:t> 이 공급 문제를 어떻게 푸느냐가 근섬유의 종류를 가르고, 그것이 다시 운동 능력의 차이를 만든다.</a:t>
+            </a:r>
+          </a:p>
+          <a:p>
+            <a:pPr>
+              <a:spcAft>
+                <a:spcPts val="900"/>
+              </a:spcAft>
+            </a:pPr>
+            <a:r>
+              <a:rPr sz="1800" b="1" i="0">
+                <a:solidFill>
+                  <a:srgbClr val="F2B705"/>
+                </a:solidFill>
+                <a:latin typeface="Malgun Gothic"/>
+                <a:ea typeface="Malgun Gothic"/>
+                <a:cs typeface="Malgun Gothic"/>
+              </a:rPr>
+              <a:t>•  </a:t>
+            </a:r>
+            <a:r>
+              <a:rPr sz="1800" b="1" i="0">
+                <a:solidFill>
+                  <a:srgbClr val="11202B"/>
+                </a:solidFill>
+                <a:latin typeface="Malgun Gothic"/>
+                <a:ea typeface="Malgun Gothic"/>
+                <a:cs typeface="Malgun Gothic"/>
+              </a:rPr>
               <a:t>에너지 공급의 세 체계.</a:t>
             </a:r>
             <a:r>
-              <a:rPr sz="2000" b="0" i="0">
+              <a:rPr sz="1800" b="0" i="0">
                 <a:solidFill>
                   <a:srgbClr val="11202B"/>
                 </a:solidFill>
